--- a/docs/PACT-explainer.pptx
+++ b/docs/PACT-explainer.pptx
@@ -3804,7 +3804,7 @@
                 </a:solidFill>
                 <a:latin typeface="Arial"/>
               </a:rPr>
-              <a:t>250</a:t>
+              <a:t>251</a:t>
             </a:r>
           </a:p>
           <a:p>
@@ -10120,7 +10120,7 @@
                 </a:solidFill>
                 <a:latin typeface="Arial"/>
               </a:rPr>
-              <a:t>250</a:t>
+              <a:t>251</a:t>
             </a:r>
           </a:p>
           <a:p>
@@ -10136,7 +10136,7 @@
                 </a:solidFill>
                 <a:latin typeface="Arial"/>
               </a:rPr>
-              <a:t>tests — 195 pytest, 55 vitest</a:t>
+              <a:t>tests — 196 pytest, 55 vitest</a:t>
             </a:r>
           </a:p>
         </p:txBody>

--- a/docs/PACT-explainer.pptx
+++ b/docs/PACT-explainer.pptx
@@ -3804,7 +3804,7 @@
                 </a:solidFill>
                 <a:latin typeface="Arial"/>
               </a:rPr>
-              <a:t>251</a:t>
+              <a:t>252</a:t>
             </a:r>
           </a:p>
           <a:p>
@@ -10120,7 +10120,7 @@
                 </a:solidFill>
                 <a:latin typeface="Arial"/>
               </a:rPr>
-              <a:t>251</a:t>
+              <a:t>252</a:t>
             </a:r>
           </a:p>
           <a:p>
@@ -10136,7 +10136,7 @@
                 </a:solidFill>
                 <a:latin typeface="Arial"/>
               </a:rPr>
-              <a:t>tests — 196 pytest, 55 vitest</a:t>
+              <a:t>tests — 197 pytest, 55 vitest</a:t>
             </a:r>
           </a:p>
         </p:txBody>

--- a/docs/PACT-explainer.pptx
+++ b/docs/PACT-explainer.pptx
@@ -3804,7 +3804,7 @@
                 </a:solidFill>
                 <a:latin typeface="Arial"/>
               </a:rPr>
-              <a:t>252</a:t>
+              <a:t>253</a:t>
             </a:r>
           </a:p>
           <a:p>
@@ -10120,7 +10120,7 @@
                 </a:solidFill>
                 <a:latin typeface="Arial"/>
               </a:rPr>
-              <a:t>252</a:t>
+              <a:t>253</a:t>
             </a:r>
           </a:p>
           <a:p>
@@ -10136,7 +10136,7 @@
                 </a:solidFill>
                 <a:latin typeface="Arial"/>
               </a:rPr>
-              <a:t>tests — 197 pytest, 55 vitest</a:t>
+              <a:t>tests — 198 pytest, 55 vitest</a:t>
             </a:r>
           </a:p>
         </p:txBody>

--- a/docs/PACT-explainer.pptx
+++ b/docs/PACT-explainer.pptx
@@ -3804,7 +3804,7 @@
                 </a:solidFill>
                 <a:latin typeface="Arial"/>
               </a:rPr>
-              <a:t>253</a:t>
+              <a:t>255</a:t>
             </a:r>
           </a:p>
           <a:p>
@@ -10120,7 +10120,7 @@
                 </a:solidFill>
                 <a:latin typeface="Arial"/>
               </a:rPr>
-              <a:t>253</a:t>
+              <a:t>255</a:t>
             </a:r>
           </a:p>
           <a:p>
@@ -10136,7 +10136,7 @@
                 </a:solidFill>
                 <a:latin typeface="Arial"/>
               </a:rPr>
-              <a:t>tests — 198 pytest, 55 vitest</a:t>
+              <a:t>tests — 200 pytest, 55 vitest</a:t>
             </a:r>
           </a:p>
         </p:txBody>

--- a/docs/PACT-explainer.pptx
+++ b/docs/PACT-explainer.pptx
@@ -3804,7 +3804,7 @@
                 </a:solidFill>
                 <a:latin typeface="Arial"/>
               </a:rPr>
-              <a:t>255</a:t>
+              <a:t>259</a:t>
             </a:r>
           </a:p>
           <a:p>
@@ -10120,7 +10120,7 @@
                 </a:solidFill>
                 <a:latin typeface="Arial"/>
               </a:rPr>
-              <a:t>255</a:t>
+              <a:t>259</a:t>
             </a:r>
           </a:p>
           <a:p>
@@ -10136,7 +10136,7 @@
                 </a:solidFill>
                 <a:latin typeface="Arial"/>
               </a:rPr>
-              <a:t>tests — 200 pytest, 55 vitest</a:t>
+              <a:t>tests — 204 pytest, 55 vitest</a:t>
             </a:r>
           </a:p>
         </p:txBody>

--- a/docs/PACT-explainer.pptx
+++ b/docs/PACT-explainer.pptx
@@ -3804,7 +3804,7 @@
                 </a:solidFill>
                 <a:latin typeface="Arial"/>
               </a:rPr>
-              <a:t>259</a:t>
+              <a:t>261</a:t>
             </a:r>
           </a:p>
           <a:p>
@@ -10120,7 +10120,7 @@
                 </a:solidFill>
                 <a:latin typeface="Arial"/>
               </a:rPr>
-              <a:t>259</a:t>
+              <a:t>261</a:t>
             </a:r>
           </a:p>
           <a:p>
@@ -10136,7 +10136,7 @@
                 </a:solidFill>
                 <a:latin typeface="Arial"/>
               </a:rPr>
-              <a:t>tests — 204 pytest, 55 vitest</a:t>
+              <a:t>tests — 206 pytest, 55 vitest</a:t>
             </a:r>
           </a:p>
         </p:txBody>

--- a/docs/PACT-explainer.pptx
+++ b/docs/PACT-explainer.pptx
@@ -3804,7 +3804,7 @@
                 </a:solidFill>
                 <a:latin typeface="Arial"/>
               </a:rPr>
-              <a:t>261</a:t>
+              <a:t>268</a:t>
             </a:r>
           </a:p>
           <a:p>
@@ -10120,7 +10120,7 @@
                 </a:solidFill>
                 <a:latin typeface="Arial"/>
               </a:rPr>
-              <a:t>261</a:t>
+              <a:t>268</a:t>
             </a:r>
           </a:p>
           <a:p>
@@ -10136,7 +10136,7 @@
                 </a:solidFill>
                 <a:latin typeface="Arial"/>
               </a:rPr>
-              <a:t>tests — 206 pytest, 55 vitest</a:t>
+              <a:t>tests — 213 pytest, 55 vitest</a:t>
             </a:r>
           </a:p>
         </p:txBody>

--- a/docs/PACT-explainer.pptx
+++ b/docs/PACT-explainer.pptx
@@ -3804,7 +3804,7 @@
                 </a:solidFill>
                 <a:latin typeface="Arial"/>
               </a:rPr>
-              <a:t>268</a:t>
+              <a:t>269</a:t>
             </a:r>
           </a:p>
           <a:p>
@@ -10120,7 +10120,7 @@
                 </a:solidFill>
                 <a:latin typeface="Arial"/>
               </a:rPr>
-              <a:t>268</a:t>
+              <a:t>269</a:t>
             </a:r>
           </a:p>
           <a:p>
@@ -10136,7 +10136,7 @@
                 </a:solidFill>
                 <a:latin typeface="Arial"/>
               </a:rPr>
-              <a:t>tests — 213 pytest, 55 vitest</a:t>
+              <a:t>tests — 214 pytest, 55 vitest</a:t>
             </a:r>
           </a:p>
         </p:txBody>
